--- a/dist/초4/영어/표현과문화/초4_영어_표현과문화_01_사물묘사하기_학생용.pptx
+++ b/dist/초4/영어/표현과문화/초4_영어_표현과문화_01_사물묘사하기_학생용.pptx
@@ -119,20 +119,20 @@
   <p:extLst>
     <p:ext uri="{521415D9-36F7-43E2-AB2F-B90AF26B5E84}">
       <p14:sectionLst xmlns:p14="http://schemas.microsoft.com/office/powerpoint/2010/main">
-        <p14:section name="도입" id="{799fe301-4504-1874-4e8e-8c4b02249627}">
+        <p14:section name="도입" id="{14bbf3be-ccd6-b0a3-ee0a-5ea7d6ffba2f}">
           <p14:sldIdLst>
             <p14:sldId id="256"/>
             <p14:sldId id="257"/>
           </p14:sldIdLst>
         </p14:section>
-        <p14:section name="개념" id="{639b345c-3879-b5e0-f6f3-a0fced89bf6f}">
+        <p14:section name="개념" id="{c47f798d-e68d-31a0-70e5-b5d5a578c573}">
           <p14:sldIdLst>
             <p14:sldId id="258"/>
             <p14:sldId id="259"/>
             <p14:sldId id="260"/>
           </p14:sldIdLst>
         </p14:section>
-        <p14:section name="연습" id="{39e130d6-803c-ac7d-d8d9-9f5b90d8df52}">
+        <p14:section name="연습" id="{adad25c3-1f93-f7e1-410c-940f517610da}">
           <p14:sldIdLst>
             <p14:sldId id="261"/>
             <p14:sldId id="262"/>
@@ -140,18 +140,18 @@
             <p14:sldId id="264"/>
           </p14:sldIdLst>
         </p14:section>
-        <p14:section name="확인" id="{102d4eaf-ac84-6549-2778-7839d57a6722}">
+        <p14:section name="확인" id="{c2823227-0959-f2cd-a366-ce85ca56f370}">
           <p14:sldIdLst>
             <p14:sldId id="265"/>
             <p14:sldId id="266"/>
           </p14:sldIdLst>
         </p14:section>
-        <p14:section name="정리" id="{ca902de9-68c1-4d47-812a-97b3d722e63b}">
+        <p14:section name="정리" id="{3cbfc15a-1e16-c191-414c-b9aa63cb12f2}">
           <p14:sldIdLst>
             <p14:sldId id="267"/>
           </p14:sldIdLst>
         </p14:section>
-        <p14:section name="보충" id="{9a6b4bd6-8184-8d00-ed1c-27c3d8d1e70c}">
+        <p14:section name="보충" id="{8311aee3-c60a-02b8-d305-7704da0efc4f}">
           <p14:sldIdLst>
             <p14:sldId id="268"/>
           </p14:sldIdLst>

--- a/dist/초4/영어/표현과문화/초4_영어_표현과문화_01_사물묘사하기_학생용.pptx
+++ b/dist/초4/영어/표현과문화/초4_영어_표현과문화_01_사물묘사하기_학생용.pptx
@@ -119,20 +119,20 @@
   <p:extLst>
     <p:ext uri="{521415D9-36F7-43E2-AB2F-B90AF26B5E84}">
       <p14:sectionLst xmlns:p14="http://schemas.microsoft.com/office/powerpoint/2010/main">
-        <p14:section name="도입" id="{14bbf3be-ccd6-b0a3-ee0a-5ea7d6ffba2f}">
+        <p14:section name="도입" id="{568f398b-7d35-559e-f731-3ba0346654b7}">
           <p14:sldIdLst>
             <p14:sldId id="256"/>
             <p14:sldId id="257"/>
           </p14:sldIdLst>
         </p14:section>
-        <p14:section name="개념" id="{c47f798d-e68d-31a0-70e5-b5d5a578c573}">
+        <p14:section name="개념" id="{8eb3017e-28e2-f126-8161-f25a13ed9df0}">
           <p14:sldIdLst>
             <p14:sldId id="258"/>
             <p14:sldId id="259"/>
             <p14:sldId id="260"/>
           </p14:sldIdLst>
         </p14:section>
-        <p14:section name="연습" id="{adad25c3-1f93-f7e1-410c-940f517610da}">
+        <p14:section name="연습" id="{a4dd3fb8-353b-9da2-2187-961e62f461a5}">
           <p14:sldIdLst>
             <p14:sldId id="261"/>
             <p14:sldId id="262"/>
@@ -140,18 +140,18 @@
             <p14:sldId id="264"/>
           </p14:sldIdLst>
         </p14:section>
-        <p14:section name="확인" id="{c2823227-0959-f2cd-a366-ce85ca56f370}">
+        <p14:section name="확인" id="{5182ad9d-74b6-3039-7013-436f1005de22}">
           <p14:sldIdLst>
             <p14:sldId id="265"/>
             <p14:sldId id="266"/>
           </p14:sldIdLst>
         </p14:section>
-        <p14:section name="정리" id="{3cbfc15a-1e16-c191-414c-b9aa63cb12f2}">
+        <p14:section name="정리" id="{1d73fec7-ff4e-3729-bcf4-f68fc7a3ea27}">
           <p14:sldIdLst>
             <p14:sldId id="267"/>
           </p14:sldIdLst>
         </p14:section>
-        <p14:section name="보충" id="{8311aee3-c60a-02b8-d305-7704da0efc4f}">
+        <p14:section name="보충" id="{a87df193-a986-2dfc-808d-f60818d38ac4}">
           <p14:sldIdLst>
             <p14:sldId id="268"/>
           </p14:sldIdLst>
